--- a/outputs/produkte/mama-ceo/03-praesentationen/saeule-4/05-lektion-4-5.pptx
+++ b/outputs/produkte/mama-ceo/03-praesentationen/saeule-4/05-lektion-4-5.pptx
@@ -4424,6 +4424,14 @@
 <file path=ppt/slides/slide1.xml><?xml version="1.0" encoding="utf-8"?>
 <p:sld xmlns:a="http://schemas.openxmlformats.org/drawingml/2006/main" xmlns:p="http://schemas.openxmlformats.org/presentationml/2006/main" xmlns:r="http://schemas.openxmlformats.org/officeDocument/2006/relationships">
   <p:cSld>
+    <p:bg>
+      <p:bgPr>
+        <a:solidFill>
+          <a:srgbClr val="F1ECDD"/>
+        </a:solidFill>
+        <a:effectLst/>
+      </p:bgPr>
+    </p:bg>
     <p:spTree>
       <p:nvGrpSpPr>
         <p:cNvPr id="1" name=""/>
@@ -4699,6 +4707,14 @@
 <file path=ppt/slides/slide10.xml><?xml version="1.0" encoding="utf-8"?>
 <p:sld xmlns:a="http://schemas.openxmlformats.org/drawingml/2006/main" xmlns:p="http://schemas.openxmlformats.org/presentationml/2006/main" xmlns:r="http://schemas.openxmlformats.org/officeDocument/2006/relationships">
   <p:cSld>
+    <p:bg>
+      <p:bgPr>
+        <a:solidFill>
+          <a:srgbClr val="F1ECDD"/>
+        </a:solidFill>
+        <a:effectLst/>
+      </p:bgPr>
+    </p:bg>
     <p:spTree>
       <p:nvGrpSpPr>
         <p:cNvPr id="1" name=""/>
@@ -4774,7 +4790,7 @@
                 </a:solidFill>
                 <a:latin typeface="Calibri"/>
               </a:rPr>
-              <a:t>▸  </a:t>
+              <a:t>✓  </a:t>
             </a:r>
             <a:r>
               <a:rPr sz="1600" b="0">
@@ -4799,7 +4815,7 @@
                 </a:solidFill>
                 <a:latin typeface="Calibri"/>
               </a:rPr>
-              <a:t>▸  </a:t>
+              <a:t>✓  </a:t>
             </a:r>
             <a:r>
               <a:rPr sz="1600" b="0">
@@ -4824,7 +4840,7 @@
                 </a:solidFill>
                 <a:latin typeface="Calibri"/>
               </a:rPr>
-              <a:t>▸  </a:t>
+              <a:t>✓  </a:t>
             </a:r>
             <a:r>
               <a:rPr sz="1600" b="0">
@@ -4918,6 +4934,14 @@
 <file path=ppt/slides/slide11.xml><?xml version="1.0" encoding="utf-8"?>
 <p:sld xmlns:a="http://schemas.openxmlformats.org/drawingml/2006/main" xmlns:p="http://schemas.openxmlformats.org/presentationml/2006/main" xmlns:r="http://schemas.openxmlformats.org/officeDocument/2006/relationships">
   <p:cSld>
+    <p:bg>
+      <p:bgPr>
+        <a:solidFill>
+          <a:srgbClr val="F1ECDD"/>
+        </a:solidFill>
+        <a:effectLst/>
+      </p:bgPr>
+    </p:bg>
     <p:spTree>
       <p:nvGrpSpPr>
         <p:cNvPr id="1" name=""/>
@@ -4993,7 +5017,7 @@
                 </a:solidFill>
                 <a:latin typeface="Calibri"/>
               </a:rPr>
-              <a:t>▸  </a:t>
+              <a:t>✓  </a:t>
             </a:r>
             <a:r>
               <a:rPr sz="1600" b="0">
@@ -5018,7 +5042,7 @@
                 </a:solidFill>
                 <a:latin typeface="Calibri"/>
               </a:rPr>
-              <a:t>▸  </a:t>
+              <a:t>✓  </a:t>
             </a:r>
             <a:r>
               <a:rPr sz="1600" b="0">
@@ -5043,7 +5067,7 @@
                 </a:solidFill>
                 <a:latin typeface="Calibri"/>
               </a:rPr>
-              <a:t>▸  </a:t>
+              <a:t>✓  </a:t>
             </a:r>
             <a:r>
               <a:rPr sz="1600" b="0">
@@ -5137,6 +5161,14 @@
 <file path=ppt/slides/slide12.xml><?xml version="1.0" encoding="utf-8"?>
 <p:sld xmlns:a="http://schemas.openxmlformats.org/drawingml/2006/main" xmlns:p="http://schemas.openxmlformats.org/presentationml/2006/main" xmlns:r="http://schemas.openxmlformats.org/officeDocument/2006/relationships">
   <p:cSld>
+    <p:bg>
+      <p:bgPr>
+        <a:solidFill>
+          <a:srgbClr val="F1ECDD"/>
+        </a:solidFill>
+        <a:effectLst/>
+      </p:bgPr>
+    </p:bg>
     <p:spTree>
       <p:nvGrpSpPr>
         <p:cNvPr id="1" name=""/>
@@ -5212,7 +5244,7 @@
                 </a:solidFill>
                 <a:latin typeface="Calibri"/>
               </a:rPr>
-              <a:t>▸  </a:t>
+              <a:t>✓  </a:t>
             </a:r>
             <a:r>
               <a:rPr sz="1600" b="0">
@@ -5237,7 +5269,7 @@
                 </a:solidFill>
                 <a:latin typeface="Calibri"/>
               </a:rPr>
-              <a:t>▸  </a:t>
+              <a:t>✓  </a:t>
             </a:r>
             <a:r>
               <a:rPr sz="1600" b="0">
@@ -5262,7 +5294,7 @@
                 </a:solidFill>
                 <a:latin typeface="Calibri"/>
               </a:rPr>
-              <a:t>▸  </a:t>
+              <a:t>✓  </a:t>
             </a:r>
             <a:r>
               <a:rPr sz="1600" b="0">
@@ -5356,6 +5388,14 @@
 <file path=ppt/slides/slide13.xml><?xml version="1.0" encoding="utf-8"?>
 <p:sld xmlns:a="http://schemas.openxmlformats.org/drawingml/2006/main" xmlns:p="http://schemas.openxmlformats.org/presentationml/2006/main" xmlns:r="http://schemas.openxmlformats.org/officeDocument/2006/relationships">
   <p:cSld>
+    <p:bg>
+      <p:bgPr>
+        <a:solidFill>
+          <a:srgbClr val="F1ECDD"/>
+        </a:solidFill>
+        <a:effectLst/>
+      </p:bgPr>
+    </p:bg>
     <p:spTree>
       <p:nvGrpSpPr>
         <p:cNvPr id="1" name=""/>
@@ -5431,7 +5471,7 @@
                 </a:solidFill>
                 <a:latin typeface="Calibri"/>
               </a:rPr>
-              <a:t>▸  </a:t>
+              <a:t>✓  </a:t>
             </a:r>
             <a:r>
               <a:rPr sz="1600" b="0">
@@ -5456,7 +5496,7 @@
                 </a:solidFill>
                 <a:latin typeface="Calibri"/>
               </a:rPr>
-              <a:t>▸  </a:t>
+              <a:t>✓  </a:t>
             </a:r>
             <a:r>
               <a:rPr sz="1600" b="0">
@@ -5481,7 +5521,7 @@
                 </a:solidFill>
                 <a:latin typeface="Calibri"/>
               </a:rPr>
-              <a:t>▸  </a:t>
+              <a:t>✓  </a:t>
             </a:r>
             <a:r>
               <a:rPr sz="1600" b="0">
@@ -5575,6 +5615,14 @@
 <file path=ppt/slides/slide14.xml><?xml version="1.0" encoding="utf-8"?>
 <p:sld xmlns:a="http://schemas.openxmlformats.org/drawingml/2006/main" xmlns:p="http://schemas.openxmlformats.org/presentationml/2006/main" xmlns:r="http://schemas.openxmlformats.org/officeDocument/2006/relationships">
   <p:cSld>
+    <p:bg>
+      <p:bgPr>
+        <a:solidFill>
+          <a:srgbClr val="F1ECDD"/>
+        </a:solidFill>
+        <a:effectLst/>
+      </p:bgPr>
+    </p:bg>
     <p:spTree>
       <p:nvGrpSpPr>
         <p:cNvPr id="1" name=""/>
@@ -5650,7 +5698,7 @@
                 </a:solidFill>
                 <a:latin typeface="Calibri"/>
               </a:rPr>
-              <a:t>▸  </a:t>
+              <a:t>✓  </a:t>
             </a:r>
             <a:r>
               <a:rPr sz="1600" b="0">
@@ -5675,7 +5723,7 @@
                 </a:solidFill>
                 <a:latin typeface="Calibri"/>
               </a:rPr>
-              <a:t>▸  </a:t>
+              <a:t>✓  </a:t>
             </a:r>
             <a:r>
               <a:rPr sz="1600" b="0">
@@ -5769,6 +5817,14 @@
 <file path=ppt/slides/slide2.xml><?xml version="1.0" encoding="utf-8"?>
 <p:sld xmlns:a="http://schemas.openxmlformats.org/drawingml/2006/main" xmlns:p="http://schemas.openxmlformats.org/presentationml/2006/main" xmlns:r="http://schemas.openxmlformats.org/officeDocument/2006/relationships">
   <p:cSld>
+    <p:bg>
+      <p:bgPr>
+        <a:solidFill>
+          <a:srgbClr val="F1ECDD"/>
+        </a:solidFill>
+        <a:effectLst/>
+      </p:bgPr>
+    </p:bg>
     <p:spTree>
       <p:nvGrpSpPr>
         <p:cNvPr id="1" name=""/>
@@ -5844,7 +5900,7 @@
                 </a:solidFill>
                 <a:latin typeface="Calibri"/>
               </a:rPr>
-              <a:t>▸  </a:t>
+              <a:t>✓  </a:t>
             </a:r>
             <a:r>
               <a:rPr sz="1600" b="0">
@@ -5869,7 +5925,7 @@
                 </a:solidFill>
                 <a:latin typeface="Calibri"/>
               </a:rPr>
-              <a:t>▸  </a:t>
+              <a:t>✓  </a:t>
             </a:r>
             <a:r>
               <a:rPr sz="1600" b="0">
@@ -5894,7 +5950,7 @@
                 </a:solidFill>
                 <a:latin typeface="Calibri"/>
               </a:rPr>
-              <a:t>▸  </a:t>
+              <a:t>✓  </a:t>
             </a:r>
             <a:r>
               <a:rPr sz="1600" b="0">
@@ -5988,6 +6044,14 @@
 <file path=ppt/slides/slide3.xml><?xml version="1.0" encoding="utf-8"?>
 <p:sld xmlns:a="http://schemas.openxmlformats.org/drawingml/2006/main" xmlns:p="http://schemas.openxmlformats.org/presentationml/2006/main" xmlns:r="http://schemas.openxmlformats.org/officeDocument/2006/relationships">
   <p:cSld>
+    <p:bg>
+      <p:bgPr>
+        <a:solidFill>
+          <a:srgbClr val="F1ECDD"/>
+        </a:solidFill>
+        <a:effectLst/>
+      </p:bgPr>
+    </p:bg>
     <p:spTree>
       <p:nvGrpSpPr>
         <p:cNvPr id="1" name=""/>
@@ -6063,7 +6127,7 @@
                 </a:solidFill>
                 <a:latin typeface="Calibri"/>
               </a:rPr>
-              <a:t>▸  </a:t>
+              <a:t>✓  </a:t>
             </a:r>
             <a:r>
               <a:rPr sz="1600" b="0">
@@ -6088,7 +6152,7 @@
                 </a:solidFill>
                 <a:latin typeface="Calibri"/>
               </a:rPr>
-              <a:t>▸  </a:t>
+              <a:t>✓  </a:t>
             </a:r>
             <a:r>
               <a:rPr sz="1600" b="0">
@@ -6113,7 +6177,7 @@
                 </a:solidFill>
                 <a:latin typeface="Calibri"/>
               </a:rPr>
-              <a:t>▸  </a:t>
+              <a:t>✓  </a:t>
             </a:r>
             <a:r>
               <a:rPr sz="1600" b="0">
@@ -6207,6 +6271,14 @@
 <file path=ppt/slides/slide4.xml><?xml version="1.0" encoding="utf-8"?>
 <p:sld xmlns:a="http://schemas.openxmlformats.org/drawingml/2006/main" xmlns:p="http://schemas.openxmlformats.org/presentationml/2006/main" xmlns:r="http://schemas.openxmlformats.org/officeDocument/2006/relationships">
   <p:cSld>
+    <p:bg>
+      <p:bgPr>
+        <a:solidFill>
+          <a:srgbClr val="F1ECDD"/>
+        </a:solidFill>
+        <a:effectLst/>
+      </p:bgPr>
+    </p:bg>
     <p:spTree>
       <p:nvGrpSpPr>
         <p:cNvPr id="1" name=""/>
@@ -6282,7 +6354,7 @@
                 </a:solidFill>
                 <a:latin typeface="Calibri"/>
               </a:rPr>
-              <a:t>▸  </a:t>
+              <a:t>✓  </a:t>
             </a:r>
             <a:r>
               <a:rPr sz="1600" b="0">
@@ -6307,7 +6379,7 @@
                 </a:solidFill>
                 <a:latin typeface="Calibri"/>
               </a:rPr>
-              <a:t>▸  </a:t>
+              <a:t>✓  </a:t>
             </a:r>
             <a:r>
               <a:rPr sz="1600" b="0">
@@ -6332,7 +6404,7 @@
                 </a:solidFill>
                 <a:latin typeface="Calibri"/>
               </a:rPr>
-              <a:t>▸  </a:t>
+              <a:t>✓  </a:t>
             </a:r>
             <a:r>
               <a:rPr sz="1600" b="0">
@@ -6426,6 +6498,14 @@
 <file path=ppt/slides/slide5.xml><?xml version="1.0" encoding="utf-8"?>
 <p:sld xmlns:a="http://schemas.openxmlformats.org/drawingml/2006/main" xmlns:p="http://schemas.openxmlformats.org/presentationml/2006/main" xmlns:r="http://schemas.openxmlformats.org/officeDocument/2006/relationships">
   <p:cSld>
+    <p:bg>
+      <p:bgPr>
+        <a:solidFill>
+          <a:srgbClr val="F1ECDD"/>
+        </a:solidFill>
+        <a:effectLst/>
+      </p:bgPr>
+    </p:bg>
     <p:spTree>
       <p:nvGrpSpPr>
         <p:cNvPr id="1" name=""/>
@@ -6501,7 +6581,7 @@
                 </a:solidFill>
                 <a:latin typeface="Calibri"/>
               </a:rPr>
-              <a:t>▸  </a:t>
+              <a:t>✓  </a:t>
             </a:r>
             <a:r>
               <a:rPr sz="1600" b="0">
@@ -6526,7 +6606,7 @@
                 </a:solidFill>
                 <a:latin typeface="Calibri"/>
               </a:rPr>
-              <a:t>▸  </a:t>
+              <a:t>✓  </a:t>
             </a:r>
             <a:r>
               <a:rPr sz="1600" b="0">
@@ -6551,7 +6631,7 @@
                 </a:solidFill>
                 <a:latin typeface="Calibri"/>
               </a:rPr>
-              <a:t>▸  </a:t>
+              <a:t>✓  </a:t>
             </a:r>
             <a:r>
               <a:rPr sz="1600" b="0">
@@ -6645,6 +6725,14 @@
 <file path=ppt/slides/slide6.xml><?xml version="1.0" encoding="utf-8"?>
 <p:sld xmlns:a="http://schemas.openxmlformats.org/drawingml/2006/main" xmlns:p="http://schemas.openxmlformats.org/presentationml/2006/main" xmlns:r="http://schemas.openxmlformats.org/officeDocument/2006/relationships">
   <p:cSld>
+    <p:bg>
+      <p:bgPr>
+        <a:solidFill>
+          <a:srgbClr val="F1ECDD"/>
+        </a:solidFill>
+        <a:effectLst/>
+      </p:bgPr>
+    </p:bg>
     <p:spTree>
       <p:nvGrpSpPr>
         <p:cNvPr id="1" name=""/>
@@ -6720,7 +6808,7 @@
                 </a:solidFill>
                 <a:latin typeface="Calibri"/>
               </a:rPr>
-              <a:t>▸  </a:t>
+              <a:t>✓  </a:t>
             </a:r>
             <a:r>
               <a:rPr sz="1600" b="0">
@@ -6745,7 +6833,7 @@
                 </a:solidFill>
                 <a:latin typeface="Calibri"/>
               </a:rPr>
-              <a:t>▸  </a:t>
+              <a:t>✓  </a:t>
             </a:r>
             <a:r>
               <a:rPr sz="1600" b="0">
@@ -6770,7 +6858,7 @@
                 </a:solidFill>
                 <a:latin typeface="Calibri"/>
               </a:rPr>
-              <a:t>▸  </a:t>
+              <a:t>✓  </a:t>
             </a:r>
             <a:r>
               <a:rPr sz="1600" b="0">
@@ -6864,6 +6952,14 @@
 <file path=ppt/slides/slide7.xml><?xml version="1.0" encoding="utf-8"?>
 <p:sld xmlns:a="http://schemas.openxmlformats.org/drawingml/2006/main" xmlns:p="http://schemas.openxmlformats.org/presentationml/2006/main" xmlns:r="http://schemas.openxmlformats.org/officeDocument/2006/relationships">
   <p:cSld>
+    <p:bg>
+      <p:bgPr>
+        <a:solidFill>
+          <a:srgbClr val="F1ECDD"/>
+        </a:solidFill>
+        <a:effectLst/>
+      </p:bgPr>
+    </p:bg>
     <p:spTree>
       <p:nvGrpSpPr>
         <p:cNvPr id="1" name=""/>
@@ -6939,7 +7035,7 @@
                 </a:solidFill>
                 <a:latin typeface="Calibri"/>
               </a:rPr>
-              <a:t>▸  </a:t>
+              <a:t>✓  </a:t>
             </a:r>
             <a:r>
               <a:rPr sz="1600" b="0">
@@ -6964,7 +7060,7 @@
                 </a:solidFill>
                 <a:latin typeface="Calibri"/>
               </a:rPr>
-              <a:t>▸  </a:t>
+              <a:t>✓  </a:t>
             </a:r>
             <a:r>
               <a:rPr sz="1600" b="0">
@@ -6989,7 +7085,7 @@
                 </a:solidFill>
                 <a:latin typeface="Calibri"/>
               </a:rPr>
-              <a:t>▸  </a:t>
+              <a:t>✓  </a:t>
             </a:r>
             <a:r>
               <a:rPr sz="1600" b="0">
@@ -7083,6 +7179,14 @@
 <file path=ppt/slides/slide8.xml><?xml version="1.0" encoding="utf-8"?>
 <p:sld xmlns:a="http://schemas.openxmlformats.org/drawingml/2006/main" xmlns:p="http://schemas.openxmlformats.org/presentationml/2006/main" xmlns:r="http://schemas.openxmlformats.org/officeDocument/2006/relationships">
   <p:cSld>
+    <p:bg>
+      <p:bgPr>
+        <a:solidFill>
+          <a:srgbClr val="F1ECDD"/>
+        </a:solidFill>
+        <a:effectLst/>
+      </p:bgPr>
+    </p:bg>
     <p:spTree>
       <p:nvGrpSpPr>
         <p:cNvPr id="1" name=""/>
@@ -7158,7 +7262,7 @@
                 </a:solidFill>
                 <a:latin typeface="Calibri"/>
               </a:rPr>
-              <a:t>▸  </a:t>
+              <a:t>✓  </a:t>
             </a:r>
             <a:r>
               <a:rPr sz="1600" b="0">
@@ -7183,7 +7287,7 @@
                 </a:solidFill>
                 <a:latin typeface="Calibri"/>
               </a:rPr>
-              <a:t>▸  </a:t>
+              <a:t>✓  </a:t>
             </a:r>
             <a:r>
               <a:rPr sz="1600" b="0">
@@ -7208,7 +7312,7 @@
                 </a:solidFill>
                 <a:latin typeface="Calibri"/>
               </a:rPr>
-              <a:t>▸  </a:t>
+              <a:t>✓  </a:t>
             </a:r>
             <a:r>
               <a:rPr sz="1600" b="0">
@@ -7302,6 +7406,14 @@
 <file path=ppt/slides/slide9.xml><?xml version="1.0" encoding="utf-8"?>
 <p:sld xmlns:a="http://schemas.openxmlformats.org/drawingml/2006/main" xmlns:p="http://schemas.openxmlformats.org/presentationml/2006/main" xmlns:r="http://schemas.openxmlformats.org/officeDocument/2006/relationships">
   <p:cSld>
+    <p:bg>
+      <p:bgPr>
+        <a:solidFill>
+          <a:srgbClr val="F1ECDD"/>
+        </a:solidFill>
+        <a:effectLst/>
+      </p:bgPr>
+    </p:bg>
     <p:spTree>
       <p:nvGrpSpPr>
         <p:cNvPr id="1" name=""/>
@@ -7377,7 +7489,7 @@
                 </a:solidFill>
                 <a:latin typeface="Calibri"/>
               </a:rPr>
-              <a:t>▸  </a:t>
+              <a:t>✓  </a:t>
             </a:r>
             <a:r>
               <a:rPr sz="1600" b="0">
@@ -7402,7 +7514,7 @@
                 </a:solidFill>
                 <a:latin typeface="Calibri"/>
               </a:rPr>
-              <a:t>▸  </a:t>
+              <a:t>✓  </a:t>
             </a:r>
             <a:r>
               <a:rPr sz="1600" b="0">
@@ -7427,7 +7539,7 @@
                 </a:solidFill>
                 <a:latin typeface="Calibri"/>
               </a:rPr>
-              <a:t>▸  </a:t>
+              <a:t>✓  </a:t>
             </a:r>
             <a:r>
               <a:rPr sz="1600" b="0">
